--- a/vaporizer-price-study/papers/jca_figures.pptx
+++ b/vaporizer-price-study/papers/jca_figures.pptx
@@ -3244,6 +3244,158 @@
       <p:grpSpPr/>
       <p:pic>
         <p:nvPicPr>
+          <p:cNvPr id="2" name="Picture 1" descr="fig5_regulatory_timeline.png"/>
+          <p:cNvPicPr>
+            <a:picLocks noChangeAspect="1"/>
+          </p:cNvPicPr>
+          <p:nvPr/>
+        </p:nvPicPr>
+        <p:blipFill>
+          <a:blip r:embed="rId2"/>
+          <a:stretch>
+            <a:fillRect/>
+          </a:stretch>
+        </p:blipFill>
+        <p:spPr>
+          <a:xfrm>
+            <a:off x="1480590" y="274320"/>
+            <a:ext cx="9230515" cy="4572000"/>
+          </a:xfrm>
+          <a:prstGeom prst="rect">
+            <a:avLst/>
+          </a:prstGeom>
+        </p:spPr>
+      </p:pic>
+      <p:sp>
+        <p:nvSpPr>
+          <p:cNvPr id="3" name="TextBox 2"/>
+          <p:cNvSpPr txBox="1"/>
+          <p:nvPr/>
+        </p:nvSpPr>
+        <p:spPr>
+          <a:xfrm>
+            <a:off x="685800" y="5029200"/>
+            <a:ext cx="10820095" cy="1371600"/>
+          </a:xfrm>
+          <a:prstGeom prst="rect">
+            <a:avLst/>
+          </a:prstGeom>
+          <a:noFill/>
+        </p:spPr>
+        <p:txBody>
+          <a:bodyPr wrap="square">
+            <a:spAutoFit/>
+          </a:bodyPr>
+          <a:lstStyle/>
+          <a:p>
+            <a:pPr algn="l"/>
+            <a:r>
+              <a:rPr sz="1200" b="1"/>
+              <a:t>Fig. 2. </a:t>
+            </a:r>
+            <a:r>
+              <a:rPr sz="1200" i="1"/>
+              <a:t>Anesthetic vaporizer prices mapped against the EU regulatory timeline. Shaded regions indicate regulatory phases. Data source: eBay Terapeak.</a:t>
+            </a:r>
+          </a:p>
+        </p:txBody>
+      </p:sp>
+    </p:spTree>
+  </p:cSld>
+  <p:clrMapOvr>
+    <a:masterClrMapping/>
+  </p:clrMapOvr>
+</p:sld>
+</file>
+
+<file path=ppt/slides/slide4.xml><?xml version="1.0" encoding="utf-8"?>
+<p:sld xmlns:a="http://schemas.openxmlformats.org/drawingml/2006/main" xmlns:p="http://schemas.openxmlformats.org/presentationml/2006/main" xmlns:r="http://schemas.openxmlformats.org/officeDocument/2006/relationships">
+  <p:cSld>
+    <p:spTree>
+      <p:nvGrpSpPr>
+        <p:cNvPr id="1" name=""/>
+        <p:cNvGrpSpPr/>
+        <p:nvPr/>
+      </p:nvGrpSpPr>
+      <p:grpSpPr/>
+      <p:pic>
+        <p:nvPicPr>
+          <p:cNvPr id="2" name="Picture 1" descr="fig6_quarterly_trends.png"/>
+          <p:cNvPicPr>
+            <a:picLocks noChangeAspect="1"/>
+          </p:cNvPicPr>
+          <p:nvPr/>
+        </p:nvPicPr>
+        <p:blipFill>
+          <a:blip r:embed="rId2"/>
+          <a:stretch>
+            <a:fillRect/>
+          </a:stretch>
+        </p:blipFill>
+        <p:spPr>
+          <a:xfrm>
+            <a:off x="3448704" y="274320"/>
+            <a:ext cx="5294286" cy="4572000"/>
+          </a:xfrm>
+          <a:prstGeom prst="rect">
+            <a:avLst/>
+          </a:prstGeom>
+        </p:spPr>
+      </p:pic>
+      <p:sp>
+        <p:nvSpPr>
+          <p:cNvPr id="3" name="TextBox 2"/>
+          <p:cNvSpPr txBox="1"/>
+          <p:nvPr/>
+        </p:nvSpPr>
+        <p:spPr>
+          <a:xfrm>
+            <a:off x="685800" y="5029200"/>
+            <a:ext cx="10820095" cy="1371600"/>
+          </a:xfrm>
+          <a:prstGeom prst="rect">
+            <a:avLst/>
+          </a:prstGeom>
+          <a:noFill/>
+        </p:spPr>
+        <p:txBody>
+          <a:bodyPr wrap="square">
+            <a:spAutoFit/>
+          </a:bodyPr>
+          <a:lstStyle/>
+          <a:p>
+            <a:pPr algn="l"/>
+            <a:r>
+              <a:rPr sz="1200" b="1"/>
+              <a:t>Fig. 3. </a:t>
+            </a:r>
+            <a:r>
+              <a:rPr sz="1200" i="1"/>
+              <a:t>Quarterly median price trends (upper panel) and sales volume (lower panel). Data source: eBay Terapeak.</a:t>
+            </a:r>
+          </a:p>
+        </p:txBody>
+      </p:sp>
+    </p:spTree>
+  </p:cSld>
+  <p:clrMapOvr>
+    <a:masterClrMapping/>
+  </p:clrMapOvr>
+</p:sld>
+</file>
+
+<file path=ppt/slides/slide5.xml><?xml version="1.0" encoding="utf-8"?>
+<p:sld xmlns:a="http://schemas.openxmlformats.org/drawingml/2006/main" xmlns:p="http://schemas.openxmlformats.org/presentationml/2006/main" xmlns:r="http://schemas.openxmlformats.org/officeDocument/2006/relationships">
+  <p:cSld>
+    <p:spTree>
+      <p:nvGrpSpPr>
+        <p:cNvPr id="1" name=""/>
+        <p:cNvGrpSpPr/>
+        <p:nvPr/>
+      </p:nvGrpSpPr>
+      <p:grpSpPr/>
+      <p:pic>
+        <p:nvPicPr>
           <p:cNvPr id="2" name="Picture 1" descr="fig2_boxplot_comparison.png"/>
           <p:cNvPicPr>
             <a:picLocks noChangeAspect="1"/>
@@ -3291,7 +3443,7 @@
             <a:pPr algn="l"/>
             <a:r>
               <a:rPr sz="1200" b="1"/>
-              <a:t>Fig. 2. </a:t>
+              <a:t>Fig. 4. </a:t>
             </a:r>
             <a:r>
               <a:rPr sz="1200" i="1"/>
@@ -3308,7 +3460,7 @@
 </p:sld>
 </file>
 
-<file path=ppt/slides/slide4.xml><?xml version="1.0" encoding="utf-8"?>
+<file path=ppt/slides/slide6.xml><?xml version="1.0" encoding="utf-8"?>
 <p:sld xmlns:a="http://schemas.openxmlformats.org/drawingml/2006/main" xmlns:p="http://schemas.openxmlformats.org/presentationml/2006/main" xmlns:r="http://schemas.openxmlformats.org/officeDocument/2006/relationships">
   <p:cSld>
     <p:spTree>
@@ -3367,7 +3519,7 @@
             <a:pPr algn="l"/>
             <a:r>
               <a:rPr sz="1200" b="1"/>
-              <a:t>Fig. 3. </a:t>
+              <a:t>Fig. 5. </a:t>
             </a:r>
             <a:r>
               <a:rPr sz="1200" i="1"/>
@@ -3384,7 +3536,7 @@
 </p:sld>
 </file>
 
-<file path=ppt/slides/slide5.xml><?xml version="1.0" encoding="utf-8"?>
+<file path=ppt/slides/slide7.xml><?xml version="1.0" encoding="utf-8"?>
 <p:sld xmlns:a="http://schemas.openxmlformats.org/drawingml/2006/main" xmlns:p="http://schemas.openxmlformats.org/presentationml/2006/main" xmlns:r="http://schemas.openxmlformats.org/officeDocument/2006/relationships">
   <p:cSld>
     <p:spTree>
@@ -3443,163 +3595,11 @@
             <a:pPr algn="l"/>
             <a:r>
               <a:rPr sz="1200" b="1"/>
-              <a:t>Fig. 4. </a:t>
+              <a:t>Fig. 6. </a:t>
             </a:r>
             <a:r>
               <a:rPr sz="1200" i="1"/>
               <a:t>Price distribution histograms for each vaporizer type, comparing pre-ban (solid fill) and post-ban (hatched) periods. Data source: eBay Terapeak.</a:t>
-            </a:r>
-          </a:p>
-        </p:txBody>
-      </p:sp>
-    </p:spTree>
-  </p:cSld>
-  <p:clrMapOvr>
-    <a:masterClrMapping/>
-  </p:clrMapOvr>
-</p:sld>
-</file>
-
-<file path=ppt/slides/slide6.xml><?xml version="1.0" encoding="utf-8"?>
-<p:sld xmlns:a="http://schemas.openxmlformats.org/drawingml/2006/main" xmlns:p="http://schemas.openxmlformats.org/presentationml/2006/main" xmlns:r="http://schemas.openxmlformats.org/officeDocument/2006/relationships">
-  <p:cSld>
-    <p:spTree>
-      <p:nvGrpSpPr>
-        <p:cNvPr id="1" name=""/>
-        <p:cNvGrpSpPr/>
-        <p:nvPr/>
-      </p:nvGrpSpPr>
-      <p:grpSpPr/>
-      <p:pic>
-        <p:nvPicPr>
-          <p:cNvPr id="2" name="Picture 1" descr="fig5_regulatory_timeline.png"/>
-          <p:cNvPicPr>
-            <a:picLocks noChangeAspect="1"/>
-          </p:cNvPicPr>
-          <p:nvPr/>
-        </p:nvPicPr>
-        <p:blipFill>
-          <a:blip r:embed="rId2"/>
-          <a:stretch>
-            <a:fillRect/>
-          </a:stretch>
-        </p:blipFill>
-        <p:spPr>
-          <a:xfrm>
-            <a:off x="1480590" y="274320"/>
-            <a:ext cx="9230515" cy="4572000"/>
-          </a:xfrm>
-          <a:prstGeom prst="rect">
-            <a:avLst/>
-          </a:prstGeom>
-        </p:spPr>
-      </p:pic>
-      <p:sp>
-        <p:nvSpPr>
-          <p:cNvPr id="3" name="TextBox 2"/>
-          <p:cNvSpPr txBox="1"/>
-          <p:nvPr/>
-        </p:nvSpPr>
-        <p:spPr>
-          <a:xfrm>
-            <a:off x="685800" y="5029200"/>
-            <a:ext cx="10820095" cy="1371600"/>
-          </a:xfrm>
-          <a:prstGeom prst="rect">
-            <a:avLst/>
-          </a:prstGeom>
-          <a:noFill/>
-        </p:spPr>
-        <p:txBody>
-          <a:bodyPr wrap="square">
-            <a:spAutoFit/>
-          </a:bodyPr>
-          <a:lstStyle/>
-          <a:p>
-            <a:pPr algn="l"/>
-            <a:r>
-              <a:rPr sz="1200" b="1"/>
-              <a:t>Fig. 5. </a:t>
-            </a:r>
-            <a:r>
-              <a:rPr sz="1200" i="1"/>
-              <a:t>Anesthetic vaporizer prices mapped against the EU regulatory timeline. Shaded regions indicate regulatory phases. Data source: eBay Terapeak.</a:t>
-            </a:r>
-          </a:p>
-        </p:txBody>
-      </p:sp>
-    </p:spTree>
-  </p:cSld>
-  <p:clrMapOvr>
-    <a:masterClrMapping/>
-  </p:clrMapOvr>
-</p:sld>
-</file>
-
-<file path=ppt/slides/slide7.xml><?xml version="1.0" encoding="utf-8"?>
-<p:sld xmlns:a="http://schemas.openxmlformats.org/drawingml/2006/main" xmlns:p="http://schemas.openxmlformats.org/presentationml/2006/main" xmlns:r="http://schemas.openxmlformats.org/officeDocument/2006/relationships">
-  <p:cSld>
-    <p:spTree>
-      <p:nvGrpSpPr>
-        <p:cNvPr id="1" name=""/>
-        <p:cNvGrpSpPr/>
-        <p:nvPr/>
-      </p:nvGrpSpPr>
-      <p:grpSpPr/>
-      <p:pic>
-        <p:nvPicPr>
-          <p:cNvPr id="2" name="Picture 1" descr="fig6_quarterly_trends.png"/>
-          <p:cNvPicPr>
-            <a:picLocks noChangeAspect="1"/>
-          </p:cNvPicPr>
-          <p:nvPr/>
-        </p:nvPicPr>
-        <p:blipFill>
-          <a:blip r:embed="rId2"/>
-          <a:stretch>
-            <a:fillRect/>
-          </a:stretch>
-        </p:blipFill>
-        <p:spPr>
-          <a:xfrm>
-            <a:off x="3448704" y="274320"/>
-            <a:ext cx="5294286" cy="4572000"/>
-          </a:xfrm>
-          <a:prstGeom prst="rect">
-            <a:avLst/>
-          </a:prstGeom>
-        </p:spPr>
-      </p:pic>
-      <p:sp>
-        <p:nvSpPr>
-          <p:cNvPr id="3" name="TextBox 2"/>
-          <p:cNvSpPr txBox="1"/>
-          <p:nvPr/>
-        </p:nvSpPr>
-        <p:spPr>
-          <a:xfrm>
-            <a:off x="685800" y="5029200"/>
-            <a:ext cx="10820095" cy="1371600"/>
-          </a:xfrm>
-          <a:prstGeom prst="rect">
-            <a:avLst/>
-          </a:prstGeom>
-          <a:noFill/>
-        </p:spPr>
-        <p:txBody>
-          <a:bodyPr wrap="square">
-            <a:spAutoFit/>
-          </a:bodyPr>
-          <a:lstStyle/>
-          <a:p>
-            <a:pPr algn="l"/>
-            <a:r>
-              <a:rPr sz="1200" b="1"/>
-              <a:t>Fig. 6. </a:t>
-            </a:r>
-            <a:r>
-              <a:rPr sz="1200" i="1"/>
-              <a:t>Quarterly median price trends (upper panel) and sales volume (lower panel). Data source: eBay Terapeak.</a:t>
             </a:r>
           </a:p>
         </p:txBody>
